--- a/dvs_noise_inverse_problem/dvs_noise_inverse_problem_figures_en.pptx
+++ b/dvs_noise_inverse_problem/dvs_noise_inverse_problem_figures_en.pptx
@@ -3115,7 +3115,7 @@
               <a:defRPr sz="2000" b="1"/>
             </a:pPr>
             <a:r>
-              <a:t>Fig. 1: DVS × Noise Inverse Problem — Four Research Domains and Unexplored Gaps</a:t>
+              <a:t>Fig. 1: DVS × Noise Inverse Problem — Four Domains and Five Gaps (G1–G5)</a:t>
             </a:r>
           </a:p>
         </p:txBody>
@@ -3136,8 +3136,8 @@
         </p:blipFill>
         <p:spPr>
           <a:xfrm>
-            <a:off x="3713344" y="914400"/>
-            <a:ext cx="4765007" cy="5029200"/>
+            <a:off x="3701394" y="914400"/>
+            <a:ext cx="4788906" cy="5029200"/>
           </a:xfrm>
           <a:prstGeom prst="rect">
             <a:avLst/>
@@ -3174,7 +3174,7 @@
               </a:defRPr>
             </a:pPr>
             <a:r>
-              <a:t>Prior work categorized into four domains (A: DVS noise physical modeling, B: DVS noise filtering, C: DVS astronomical applications, D: Noise inverse problem in non-DVS fields). Four unexplored gaps (g1–g4) identified at domain intersections. g4 represents the most ambitious fully integrated approach.</a:t>
+              <a:t>Prior work categorized into four domains (A: DVS noise modeling, B: DVS noise filtering, C: DVS astronomical applications, D: Noise inverse problem in non-DVS fields). Five gaps (G1–G5) identified. G3 (astronomy pipeline) and G4 (template-free detection) are the highest-priority unexplored areas.</a:t>
             </a:r>
           </a:p>
         </p:txBody>
@@ -3223,14 +3223,14 @@
               <a:defRPr sz="2000" b="1"/>
             </a:pPr>
             <a:r>
-              <a:t>Fig. 2: g4 Unified Pipeline — LIGO → DVS Transplant Architecture</a:t>
+              <a:t>Fig. 2: G3 Astronomy Pipeline + G4 Template-free Detection</a:t>
             </a:r>
           </a:p>
         </p:txBody>
       </p:sp>
       <p:pic>
         <p:nvPicPr>
-          <p:cNvPr id="3" name="Picture 2" descr="fig2_g4_pipeline_en.png"/>
+          <p:cNvPr id="3" name="Picture 2" descr="fig2_g3_pipeline_en.png"/>
           <p:cNvPicPr>
             <a:picLocks noChangeAspect="1"/>
           </p:cNvPicPr>
@@ -3282,7 +3282,7 @@
               </a:defRPr>
             </a:pPr>
             <a:r>
-              <a:t>Five-stage architecture transplanting the LIGO noise reconstruction pipeline (Vajente et al. 2020) to DVS astronomical observation. Inputs: DVS main channel, auxiliary sensors (temperature, vibration, illuminance), and physics-based pixel model (A5). Pipeline: noise forward model → inverse problem solving → residual generation → faint object detection → physical validation.</a:t>
+              <a:t>Four-stage architecture transplanting the LIGO noise reconstruction pipeline (Vajente et al. 2020) to DVS astronomy (G3). Stage 4 integrates G4 template-free detection—solving for noise and discovering objects in residuals without signal templates. Inputs: DVS main channel, auxiliary sensors, and physics-based pixel model (A5).</a:t>
             </a:r>
           </a:p>
         </p:txBody>
